--- a/test_highlight.pptx
+++ b/test_highlight.pptx
@@ -7,9 +7,6 @@
   <p:sldIdLst>
     <p:sldId id="256" r:id="rId2"/>
   </p:sldIdLst>
-  <p:notesMasterIdLst>
-    <p:notesMasterId r:id="rId3"/>
-  </p:notesMasterIdLst>
   <p:sldSz cx="9144000" cy="5143500"/>
   <p:notesSz cx="5143500" cy="9144000"/>
   <p:defaultTextStyle>
@@ -105,443 +102,6 @@
     </a:lvl9pPr>
   </p:defaultTextStyle>
 </p:presentation>
-</file>
-
-<file path=ppt/notesMasters/notesMaster1.xml><?xml version="1.0" encoding="utf-8"?>
-<p:notesMaster xmlns:a="http://schemas.openxmlformats.org/drawingml/2006/main" xmlns:r="http://schemas.openxmlformats.org/officeDocument/2006/relationships" xmlns:p="http://schemas.openxmlformats.org/presentationml/2006/main">
-  <p:cSld>
-    <p:bg>
-      <p:bgRef idx="1001">
-        <a:schemeClr val="bg1"/>
-      </p:bgRef>
-    </p:bg>
-    <p:spTree>
-      <p:nvGrpSpPr>
-        <p:cNvPr id="1" name=""/>
-        <p:cNvGrpSpPr/>
-        <p:nvPr/>
-      </p:nvGrpSpPr>
-      <p:grpSpPr>
-        <a:xfrm>
-          <a:off x="0" y="0"/>
-          <a:ext cx="0" cy="0"/>
-          <a:chOff x="0" y="0"/>
-          <a:chExt cx="0" cy="0"/>
-        </a:xfrm>
-      </p:grpSpPr>
-      <p:sp>
-        <p:nvSpPr>
-          <p:cNvPr id="2" name="Header Placeholder 1"/>
-          <p:cNvSpPr>
-            <a:spLocks noGrp="1"/>
-          </p:cNvSpPr>
-          <p:nvPr>
-            <p:ph type="hdr" sz="quarter"/>
-          </p:nvPr>
-        </p:nvSpPr>
-        <p:spPr>
-          <a:xfrm>
-            <a:off x="0" y="0"/>
-            <a:ext cx="2971800" cy="458788"/>
-          </a:xfrm>
-          <a:prstGeom prst="rect">
-            <a:avLst/>
-          </a:prstGeom>
-        </p:spPr>
-        <p:txBody>
-          <a:bodyPr vert="horz" lIns="91440" tIns="45720" rIns="91440" bIns="45720" rtlCol="0"/>
-          <a:lstStyle>
-            <a:lvl1pPr algn="l">
-              <a:defRPr sz="1200"/>
-            </a:lvl1pPr>
-          </a:lstStyle>
-          <a:p>
-            <a:endParaRPr lang="en-US"/>
-          </a:p>
-        </p:txBody>
-      </p:sp>
-      <p:sp>
-        <p:nvSpPr>
-          <p:cNvPr id="3" name="Date Placeholder 2"/>
-          <p:cNvSpPr>
-            <a:spLocks noGrp="1"/>
-          </p:cNvSpPr>
-          <p:nvPr>
-            <p:ph type="dt" idx="1"/>
-          </p:nvPr>
-        </p:nvSpPr>
-        <p:spPr>
-          <a:xfrm>
-            <a:off x="3884613" y="0"/>
-            <a:ext cx="2971800" cy="458788"/>
-          </a:xfrm>
-          <a:prstGeom prst="rect">
-            <a:avLst/>
-          </a:prstGeom>
-        </p:spPr>
-        <p:txBody>
-          <a:bodyPr vert="horz" lIns="91440" tIns="45720" rIns="91440" bIns="45720" rtlCol="0"/>
-          <a:lstStyle>
-            <a:lvl1pPr algn="r">
-              <a:defRPr sz="1200"/>
-            </a:lvl1pPr>
-          </a:lstStyle>
-          <a:p>
-            <a:fld id="{5282F153-3F37-0F45-9E97-73ACFA13230C}" type="datetimeFigureOut">
-              <a:rPr lang="en-US"/>
-              <a:t>7/23/19</a:t>
-            </a:fld>
-            <a:endParaRPr lang="en-US"/>
-          </a:p>
-        </p:txBody>
-      </p:sp>
-      <p:sp>
-        <p:nvSpPr>
-          <p:cNvPr id="4" name="Slide Image Placeholder 3"/>
-          <p:cNvSpPr>
-            <a:spLocks noGrp="1" noRot="1" noChangeAspect="1"/>
-          </p:cNvSpPr>
-          <p:nvPr>
-            <p:ph type="sldImg" idx="2"/>
-          </p:nvPr>
-        </p:nvSpPr>
-        <p:spPr>
-          <a:xfrm>
-            <a:off x="685800" y="1143000"/>
-            <a:ext cx="5486400" cy="3086100"/>
-          </a:xfrm>
-          <a:prstGeom prst="rect">
-            <a:avLst/>
-          </a:prstGeom>
-          <a:noFill/>
-          <a:ln w="12700">
-            <a:solidFill>
-              <a:prstClr val="black"/>
-            </a:solidFill>
-          </a:ln>
-        </p:spPr>
-        <p:txBody>
-          <a:bodyPr vert="horz" lIns="91440" tIns="45720" rIns="91440" bIns="45720" rtlCol="0" anchor="ctr"/>
-          <a:lstStyle/>
-          <a:p>
-            <a:endParaRPr lang="en-US"/>
-          </a:p>
-        </p:txBody>
-      </p:sp>
-      <p:sp>
-        <p:nvSpPr>
-          <p:cNvPr id="5" name="Notes Placeholder 4"/>
-          <p:cNvSpPr>
-            <a:spLocks noGrp="1"/>
-          </p:cNvSpPr>
-          <p:nvPr>
-            <p:ph type="body" sz="quarter" idx="3"/>
-          </p:nvPr>
-        </p:nvSpPr>
-        <p:spPr>
-          <a:xfrm>
-            <a:off x="685800" y="4400550"/>
-            <a:ext cx="5486400" cy="3600450"/>
-          </a:xfrm>
-          <a:prstGeom prst="rect">
-            <a:avLst/>
-          </a:prstGeom>
-        </p:spPr>
-        <p:txBody>
-          <a:bodyPr vert="horz" lIns="91440" tIns="45720" rIns="91440" bIns="45720" rtlCol="0"/>
-          <a:lstStyle/>
-          <a:p>
-            <a:pPr lvl="0"/>
-            <a:r>
-              <a:rPr lang="en-US"/>
-              <a:t>Click to edit Master text styles</a:t>
-            </a:r>
-          </a:p>
-          <a:p>
-            <a:pPr lvl="1"/>
-            <a:r>
-              <a:rPr lang="en-US"/>
-              <a:t>Second level</a:t>
-            </a:r>
-          </a:p>
-          <a:p>
-            <a:pPr lvl="2"/>
-            <a:r>
-              <a:rPr lang="en-US"/>
-              <a:t>Third level</a:t>
-            </a:r>
-          </a:p>
-          <a:p>
-            <a:pPr lvl="3"/>
-            <a:r>
-              <a:rPr lang="en-US"/>
-              <a:t>Fourth level</a:t>
-            </a:r>
-          </a:p>
-          <a:p>
-            <a:pPr lvl="4"/>
-            <a:r>
-              <a:rPr lang="en-US"/>
-              <a:t>Fifth level</a:t>
-            </a:r>
-          </a:p>
-        </p:txBody>
-      </p:sp>
-      <p:sp>
-        <p:nvSpPr>
-          <p:cNvPr id="6" name="Footer Placeholder 5"/>
-          <p:cNvSpPr>
-            <a:spLocks noGrp="1"/>
-          </p:cNvSpPr>
-          <p:nvPr>
-            <p:ph type="ftr" sz="quarter" idx="4"/>
-          </p:nvPr>
-        </p:nvSpPr>
-        <p:spPr>
-          <a:xfrm>
-            <a:off x="0" y="8685213"/>
-            <a:ext cx="2971800" cy="458787"/>
-          </a:xfrm>
-          <a:prstGeom prst="rect">
-            <a:avLst/>
-          </a:prstGeom>
-        </p:spPr>
-        <p:txBody>
-          <a:bodyPr vert="horz" lIns="91440" tIns="45720" rIns="91440" bIns="45720" rtlCol="0" anchor="b"/>
-          <a:lstStyle>
-            <a:lvl1pPr algn="l">
-              <a:defRPr sz="1200"/>
-            </a:lvl1pPr>
-          </a:lstStyle>
-          <a:p>
-            <a:endParaRPr lang="en-US"/>
-          </a:p>
-        </p:txBody>
-      </p:sp>
-      <p:sp>
-        <p:nvSpPr>
-          <p:cNvPr id="7" name="Slide Number Placeholder 6"/>
-          <p:cNvSpPr>
-            <a:spLocks noGrp="1"/>
-          </p:cNvSpPr>
-          <p:nvPr>
-            <p:ph type="sldNum" sz="quarter" idx="5"/>
-          </p:nvPr>
-        </p:nvSpPr>
-        <p:spPr>
-          <a:xfrm>
-            <a:off x="3884613" y="8685213"/>
-            <a:ext cx="2971800" cy="458787"/>
-          </a:xfrm>
-          <a:prstGeom prst="rect">
-            <a:avLst/>
-          </a:prstGeom>
-        </p:spPr>
-        <p:txBody>
-          <a:bodyPr vert="horz" lIns="91440" tIns="45720" rIns="91440" bIns="45720" rtlCol="0" anchor="b"/>
-          <a:lstStyle>
-            <a:lvl1pPr algn="r">
-              <a:defRPr sz="1200"/>
-            </a:lvl1pPr>
-          </a:lstStyle>
-          <a:p>
-            <a:fld id="{CE5E9CC1-C706-0F49-92D6-E571CC5EEA8F}" type="slidenum">
-              <a:rPr lang="en-US"/>
-              <a:t>‹#›</a:t>
-            </a:fld>
-            <a:endParaRPr lang="en-US"/>
-          </a:p>
-        </p:txBody>
-      </p:sp>
-    </p:spTree>
-    <p:extLst>
-      <p:ext uri="{BB962C8B-B14F-4D97-AF65-F5344CB8AC3E}">
-        <p14:creationId xmlns:p14="http://schemas.microsoft.com/office/powerpoint/2010/main" val="1024086991"/>
-      </p:ext>
-    </p:extLst>
-  </p:cSld>
-  <p:clrMap bg1="lt1" tx1="dk1" bg2="lt2" tx2="dk2" accent1="accent1" accent2="accent2" accent3="accent3" accent4="accent4" accent5="accent5" accent6="accent6" hlink="hlink" folHlink="folHlink"/>
-  <p:notesStyle>
-    <a:lvl1pPr marL="0" algn="l" defTabSz="914400" rtl="0" eaLnBrk="1" latinLnBrk="0" hangingPunct="1">
-      <a:defRPr sz="1200" kern="1200">
-        <a:solidFill>
-          <a:schemeClr val="tx1"/>
-        </a:solidFill>
-        <a:latin typeface="+mn-lt"/>
-        <a:ea typeface="+mn-ea"/>
-        <a:cs typeface="+mn-cs"/>
-      </a:defRPr>
-    </a:lvl1pPr>
-    <a:lvl2pPr marL="457200" algn="l" defTabSz="914400" rtl="0" eaLnBrk="1" latinLnBrk="0" hangingPunct="1">
-      <a:defRPr sz="1200" kern="1200">
-        <a:solidFill>
-          <a:schemeClr val="tx1"/>
-        </a:solidFill>
-        <a:latin typeface="+mn-lt"/>
-        <a:ea typeface="+mn-ea"/>
-        <a:cs typeface="+mn-cs"/>
-      </a:defRPr>
-    </a:lvl2pPr>
-    <a:lvl3pPr marL="914400" algn="l" defTabSz="914400" rtl="0" eaLnBrk="1" latinLnBrk="0" hangingPunct="1">
-      <a:defRPr sz="1200" kern="1200">
-        <a:solidFill>
-          <a:schemeClr val="tx1"/>
-        </a:solidFill>
-        <a:latin typeface="+mn-lt"/>
-        <a:ea typeface="+mn-ea"/>
-        <a:cs typeface="+mn-cs"/>
-      </a:defRPr>
-    </a:lvl3pPr>
-    <a:lvl4pPr marL="1371600" algn="l" defTabSz="914400" rtl="0" eaLnBrk="1" latinLnBrk="0" hangingPunct="1">
-      <a:defRPr sz="1200" kern="1200">
-        <a:solidFill>
-          <a:schemeClr val="tx1"/>
-        </a:solidFill>
-        <a:latin typeface="+mn-lt"/>
-        <a:ea typeface="+mn-ea"/>
-        <a:cs typeface="+mn-cs"/>
-      </a:defRPr>
-    </a:lvl4pPr>
-    <a:lvl5pPr marL="1828800" algn="l" defTabSz="914400" rtl="0" eaLnBrk="1" latinLnBrk="0" hangingPunct="1">
-      <a:defRPr sz="1200" kern="1200">
-        <a:solidFill>
-          <a:schemeClr val="tx1"/>
-        </a:solidFill>
-        <a:latin typeface="+mn-lt"/>
-        <a:ea typeface="+mn-ea"/>
-        <a:cs typeface="+mn-cs"/>
-      </a:defRPr>
-    </a:lvl5pPr>
-    <a:lvl6pPr marL="2286000" algn="l" defTabSz="914400" rtl="0" eaLnBrk="1" latinLnBrk="0" hangingPunct="1">
-      <a:defRPr sz="1200" kern="1200">
-        <a:solidFill>
-          <a:schemeClr val="tx1"/>
-        </a:solidFill>
-        <a:latin typeface="+mn-lt"/>
-        <a:ea typeface="+mn-ea"/>
-        <a:cs typeface="+mn-cs"/>
-      </a:defRPr>
-    </a:lvl6pPr>
-    <a:lvl7pPr marL="2743200" algn="l" defTabSz="914400" rtl="0" eaLnBrk="1" latinLnBrk="0" hangingPunct="1">
-      <a:defRPr sz="1200" kern="1200">
-        <a:solidFill>
-          <a:schemeClr val="tx1"/>
-        </a:solidFill>
-        <a:latin typeface="+mn-lt"/>
-        <a:ea typeface="+mn-ea"/>
-        <a:cs typeface="+mn-cs"/>
-      </a:defRPr>
-    </a:lvl7pPr>
-    <a:lvl8pPr marL="3200400" algn="l" defTabSz="914400" rtl="0" eaLnBrk="1" latinLnBrk="0" hangingPunct="1">
-      <a:defRPr sz="1200" kern="1200">
-        <a:solidFill>
-          <a:schemeClr val="tx1"/>
-        </a:solidFill>
-        <a:latin typeface="+mn-lt"/>
-        <a:ea typeface="+mn-ea"/>
-        <a:cs typeface="+mn-cs"/>
-      </a:defRPr>
-    </a:lvl8pPr>
-    <a:lvl9pPr marL="3657600" algn="l" defTabSz="914400" rtl="0" eaLnBrk="1" latinLnBrk="0" hangingPunct="1">
-      <a:defRPr sz="1200" kern="1200">
-        <a:solidFill>
-          <a:schemeClr val="tx1"/>
-        </a:solidFill>
-        <a:latin typeface="+mn-lt"/>
-        <a:ea typeface="+mn-ea"/>
-        <a:cs typeface="+mn-cs"/>
-      </a:defRPr>
-    </a:lvl9pPr>
-  </p:notesStyle>
-</p:notesMaster>
-</file>
-
-<file path=ppt/notesSlides/notesSlide1.xml><?xml version="1.0" encoding="utf-8"?>
-<p:notes xmlns:a="http://schemas.openxmlformats.org/drawingml/2006/main" xmlns:r="http://schemas.openxmlformats.org/officeDocument/2006/relationships" xmlns:p="http://schemas.openxmlformats.org/presentationml/2006/main">
-  <p:cSld>
-    <p:spTree>
-      <p:nvGrpSpPr>
-        <p:cNvPr id="1" name=""/>
-        <p:cNvGrpSpPr/>
-        <p:nvPr/>
-      </p:nvGrpSpPr>
-      <p:grpSpPr>
-        <a:xfrm>
-          <a:off x="0" y="0"/>
-          <a:ext cx="0" cy="0"/>
-          <a:chOff x="0" y="0"/>
-          <a:chExt cx="0" cy="0"/>
-        </a:xfrm>
-      </p:grpSpPr>
-      <p:sp>
-        <p:nvSpPr>
-          <p:cNvPr id="2" name="Slide Image Placeholder 1"/>
-          <p:cNvSpPr>
-            <a:spLocks noGrp="1" noRot="1" noChangeAspect="1"/>
-          </p:cNvSpPr>
-          <p:nvPr>
-            <p:ph type="sldImg"/>
-          </p:nvPr>
-        </p:nvSpPr>
-        <p:spPr/>
-      </p:sp>
-      <p:sp>
-        <p:nvSpPr>
-          <p:cNvPr id="3" name="Notes Placeholder 2"/>
-          <p:cNvSpPr>
-            <a:spLocks noGrp="1"/>
-          </p:cNvSpPr>
-          <p:nvPr>
-            <p:ph type="body" idx="1"/>
-          </p:nvPr>
-        </p:nvSpPr>
-        <p:spPr/>
-        <p:txBody>
-          <a:bodyPr/>
-          <a:lstStyle/>
-          <a:p>
-            <a:r>
-              <a:rPr lang="en-US" dirty="0"/>
-              <a:t/>
-            </a:r>
-            <a:endParaRPr lang="en-US" dirty="0"/>
-          </a:p>
-        </p:txBody>
-      </p:sp>
-      <p:sp>
-        <p:nvSpPr>
-          <p:cNvPr id="4" name="Slide Number Placeholder 3"/>
-          <p:cNvSpPr>
-            <a:spLocks noGrp="1"/>
-          </p:cNvSpPr>
-          <p:nvPr>
-            <p:ph type="sldNum" sz="quarter" idx="10"/>
-          </p:nvPr>
-        </p:nvSpPr>
-        <p:spPr/>
-        <p:txBody>
-          <a:bodyPr/>
-          <a:lstStyle/>
-          <a:p>
-            <a:fld id="{F7021451-1387-4CA6-816F-3879F97B5CBC}" type="slidenum">
-              <a:rPr lang="en-US"/>
-              <a:t>1</a:t>
-            </a:fld>
-            <a:endParaRPr lang="en-US"/>
-          </a:p>
-        </p:txBody>
-      </p:sp>
-    </p:spTree>
-    <p:extLst>
-      <p:ext uri="{BB962C8B-B14F-4D97-AF65-F5344CB8AC3E}">
-        <p14:creationId xmlns:p14="http://schemas.microsoft.com/office/powerpoint/2010/main" val="1024086991"/>
-      </p:ext>
-    </p:extLst>
-  </p:cSld>
-  <p:clrMapOvr>
-    <a:masterClrMapping/>
-  </p:clrMapOvr>
-</p:notes>
 </file>
 
 <file path=ppt/slideLayouts/slideLayout1.xml><?xml version="1.0" encoding="utf-8"?>
@@ -889,11 +449,11 @@
           <a:bodyPr wrap="square" rtlCol="0" anchor="ctr"/>
           <a:lstStyle/>
           <a:p>
-            <a:pPr algn="r" indent="0" marL="0">
+            <a:pPr algn="r" indent="0" marL="0" rtl="1">
               <a:buNone/>
             </a:pPr>
             <a:r>
-              <a:rPr lang="en-US" sz="2000" dirty="0">
+              <a:rPr lang="ar-IQ" altLang="en-US" sz="2000" dirty="0">
                 <a:solidFill>
                   <a:srgbClr val="1C1C1E"/>
                 </a:solidFill>
@@ -903,19 +463,11 @@
               </a:rPr>
               <a:t>ئەمە دەقێکی </a:t>
             </a:r>
-            <a:pPr algn="r" indent="0" marL="0">
-              <a:buNone/>
-            </a:pPr>
             <a:r>
-              <a:rPr lang="en-US" sz="2000" dirty="0">
+              <a:rPr lang="ar-IQ" altLang="en-US" sz="2000" dirty="0">
                 <a:solidFill>
                   <a:srgbClr val="1C1C1E"/>
                 </a:solidFill>
-                <a:effectLst>
-                  <a:outerShdw blurRad="25400" dist="12700" dir="2700000" algn="tl">
-                    <a:srgbClr val="808080"/>
-                  </a:outerShdw>
-                </a:effectLst>
                 <a:highlight>
                   <a:srgbClr val="FFFF00"/>
                 </a:highlight>
@@ -925,11 +477,8 @@
               </a:rPr>
               <a:t>هاینایتکراوە</a:t>
             </a:r>
-            <a:pPr algn="r" indent="0" marL="0">
-              <a:buNone/>
-            </a:pPr>
             <a:r>
-              <a:rPr lang="en-US" sz="2000" dirty="0">
+              <a:rPr lang="ar-IQ" altLang="en-US" sz="2000" dirty="0">
                 <a:solidFill>
                   <a:srgbClr val="1C1C1E"/>
                 </a:solidFill>
@@ -939,56 +488,7 @@
               </a:rPr>
               <a:t> لە ناو ڕستەکەدا.</a:t>
             </a:r>
-            <a:endParaRPr lang="en-US" sz="2000" dirty="0"/>
-          </a:p>
-        </p:txBody>
-      </p:sp>
-      <p:sp>
-        <p:nvSpPr>
-          <p:cNvPr id="3" name="Text 1"/>
-          <p:cNvSpPr/>
-          <p:nvPr/>
-        </p:nvSpPr>
-        <p:spPr>
-          <a:xfrm>
-            <a:off x="914400" y="2743200"/>
-            <a:ext cx="7315200" cy="1371600"/>
-          </a:xfrm>
-          <a:prstGeom prst="rect">
-            <a:avLst/>
-          </a:prstGeom>
-          <a:solidFill>
-            <a:srgbClr val="00FFFF"/>
-          </a:solidFill>
-          <a:ln/>
-        </p:spPr>
-        <p:txBody>
-          <a:bodyPr wrap="square" rtlCol="0" anchor="ctr"/>
-          <a:lstStyle/>
-          <a:p>
-            <a:pPr algn="r" indent="0" marL="0">
-              <a:buNone/>
-            </a:pPr>
-            <a:r>
-              <a:rPr lang="en-US" sz="2400" dirty="0">
-                <a:solidFill>
-                  <a:srgbClr val="1C1C1E"/>
-                </a:solidFill>
-                <a:effectLst>
-                  <a:outerShdw blurRad="25400" dist="12700" dir="2700000" algn="tl">
-                    <a:srgbClr val="808080"/>
-                  </a:outerShdw>
-                </a:effectLst>
-                <a:highlight>
-                  <a:srgbClr val="FFFF00"/>
-                </a:highlight>
-                <a:latin typeface="Tahoma" pitchFamily="34" charset="0"/>
-                <a:ea typeface="Tahoma" pitchFamily="34" charset="-122"/>
-                <a:cs typeface="Tahoma" pitchFamily="34" charset="-120"/>
-              </a:rPr>
-              <a:t>هەموی هاینایتکراوە</a:t>
-            </a:r>
-            <a:endParaRPr lang="en-US" sz="2400" dirty="0"/>
+            <a:endParaRPr lang="ar-IQ" sz="2000" dirty="0"/>
           </a:p>
         </p:txBody>
       </p:sp>
